--- a/presentation/DevOps-OverSight-Agent-POC-Review.pptx
+++ b/presentation/DevOps-OverSight-Agent-POC-Review.pptx
@@ -2579,7 +2579,7 @@
           <a:lstStyle/>
           <a:p>
             <a:r>
-              <a:t>This slide is intentionally blank on the verdict — you asked to keep the recommendation open until we've talked through the scorecard as a team, and with the client's context in the room. What I've put here is a decision aid, not a decision: the conditions under which each approach is the right call. Lean Ballerina-plus-proxy if you're standardizing on WSO2's agent platform, you want minimal moving parts, and correlation fidelity is paramount. Lean LangChain-plus-A2A if your teams already live in Python, a code-enforced gate is a hard compliance requirement, or you foresee many trust domains where A2A's fan-out is an advantage. When we fill in the verdict, it should reference the client's actual team and governance posture — that's the missing input, not anything technical.</a:t>
+              <a:t>This slide is filled in with real measurement — 18 runs per stack, three datasets of six — and I want to be transparent that the data corrected me on BOTH of my architecture-first predictions. I'd said Ballerina would be faster and more reliable. On the creds-free local model, qwen2.5:14b, the opposite held. Faster: LangChain, ~62-second median time-to-proposal versus ~78 for Ballerina. The reason is the interesting part — Ballerina makes about half as many LLM calls (nine versus nineteen), but each is roughly three times heavier because the single agent carries one large, growing context (the ten-step protocol plus every lazy-loaded tool schema), while LangChain's decomposed agents each keep a small context, so their calls are cheap even though there are more of them. More reliable: also LangChain, and clearly — 61 percent correct-proposal rate versus 28 percent, with Ballerina producing ZERO valid runs in one entire dataset. That flips my 'single agent = more reliable' intuition: decomposing into short, focused sub-tasks keeps a weak model on-track far better than driving one long single-agent protocol with discover_tools overhead, where the 14B tends to declare victory early after correlating a trace. The honest headline for the room: on the local model LangChain won both axes — but both are still sub-production reliability, so for a real demo use a cloud model, where both should climb toward the high 90s and the gap may change. The qualitative scorecard trade-offs are unchanged, so the final verdict still weighs the client's team and governance context — now on top of measured runtime, not my inference.</a:t>
             </a:r>
           </a:p>
         </p:txBody>
@@ -47924,7 +47924,7 @@
                 </a:solidFill>
                 <a:latin typeface="Arial"/>
               </a:rPr>
-              <a:t>COMPARISON</a:t>
+              <a:t>COMPARISON · MEASURED A/B — 18 RUNS</a:t>
             </a:r>
           </a:p>
         </p:txBody>
@@ -47969,7 +47969,7 @@
                 </a:solidFill>
                 <a:latin typeface="Arial"/>
               </a:rPr>
-              <a:t>Recommendation</a:t>
+              <a:t>Recommendation — measured, not guessed</a:t>
             </a:r>
           </a:p>
         </p:txBody>
@@ -48018,16 +48018,586 @@
           </a:p>
         </p:txBody>
       </p:sp>
-      <p:sp>
-        <p:nvSpPr>
-          <p:cNvPr id="7" name="Rounded Rectangle 6"/>
+      <p:graphicFrame>
+        <p:nvGraphicFramePr>
+          <p:cNvPr id="7" name="Table 6"/>
+          <p:cNvGraphicFramePr>
+            <a:graphicFrameLocks noGrp="1"/>
+          </p:cNvGraphicFramePr>
+          <p:nvPr/>
+        </p:nvGraphicFramePr>
+        <p:xfrm>
+          <a:off x="566928" y="1737360"/>
+          <a:ext cx="11057838" cy="2029968"/>
+        </p:xfrm>
+        <a:graphic>
+          <a:graphicData uri="http://schemas.openxmlformats.org/drawingml/2006/table">
+            <a:tbl>
+              <a:tblPr firstRow="0" bandRow="0">
+                <a:tableStyleId>{2D5ABB26-0587-4C30-8999-92F81FD0307C}</a:tableStyleId>
+              </a:tblPr>
+              <a:tblGrid>
+                <a:gridCol w="3980822"/>
+                <a:gridCol w="3538508"/>
+                <a:gridCol w="3538508"/>
+              </a:tblGrid>
+              <a:tr h="384048">
+                <a:tc>
+                  <a:txBody>
+                    <a:bodyPr wrap="square"/>
+                    <a:lstStyle/>
+                    <a:p>
+                      <a:pPr algn="l">
+                        <a:lnSpc>
+                          <a:spcPct val="100000"/>
+                        </a:lnSpc>
+                      </a:pPr>
+                      <a:r>
+                        <a:rPr sz="1050" b="1">
+                          <a:solidFill>
+                            <a:srgbClr val="FFFFFF"/>
+                          </a:solidFill>
+                          <a:latin typeface="Arial"/>
+                        </a:rPr>
+                        <a:t>Metric  —  qwen2.5:14b local · 18 runs (3 datasets × 6)</a:t>
+                      </a:r>
+                    </a:p>
+                  </a:txBody>
+                  <a:tcPr anchor="ctr" marL="91440" marR="73152" marT="18288" marB="18288">
+                    <a:solidFill>
+                      <a:srgbClr val="1B2733"/>
+                    </a:solidFill>
+                  </a:tcPr>
+                </a:tc>
+                <a:tc>
+                  <a:txBody>
+                    <a:bodyPr wrap="square"/>
+                    <a:lstStyle/>
+                    <a:p>
+                      <a:pPr algn="l">
+                        <a:lnSpc>
+                          <a:spcPct val="100000"/>
+                        </a:lnSpc>
+                      </a:pPr>
+                      <a:r>
+                        <a:rPr sz="1050" b="1">
+                          <a:solidFill>
+                            <a:srgbClr val="FFFFFF"/>
+                          </a:solidFill>
+                          <a:latin typeface="Arial"/>
+                        </a:rPr>
+                        <a:t>LangChain + A2A</a:t>
+                      </a:r>
+                    </a:p>
+                  </a:txBody>
+                  <a:tcPr anchor="ctr" marL="91440" marR="73152" marT="18288" marB="18288">
+                    <a:solidFill>
+                      <a:srgbClr val="1B2733"/>
+                    </a:solidFill>
+                  </a:tcPr>
+                </a:tc>
+                <a:tc>
+                  <a:txBody>
+                    <a:bodyPr wrap="square"/>
+                    <a:lstStyle/>
+                    <a:p>
+                      <a:pPr algn="l">
+                        <a:lnSpc>
+                          <a:spcPct val="100000"/>
+                        </a:lnSpc>
+                      </a:pPr>
+                      <a:r>
+                        <a:rPr sz="1050" b="1">
+                          <a:solidFill>
+                            <a:srgbClr val="FFFFFF"/>
+                          </a:solidFill>
+                          <a:latin typeface="Arial"/>
+                        </a:rPr>
+                        <a:t>Ballerina + MCP Proxy</a:t>
+                      </a:r>
+                    </a:p>
+                  </a:txBody>
+                  <a:tcPr anchor="ctr" marL="91440" marR="73152" marT="18288" marB="18288">
+                    <a:solidFill>
+                      <a:srgbClr val="1B2733"/>
+                    </a:solidFill>
+                  </a:tcPr>
+                </a:tc>
+              </a:tr>
+              <a:tr h="329184">
+                <a:tc>
+                  <a:txBody>
+                    <a:bodyPr wrap="square"/>
+                    <a:lstStyle/>
+                    <a:p>
+                      <a:pPr algn="l">
+                        <a:lnSpc>
+                          <a:spcPct val="100000"/>
+                        </a:lnSpc>
+                      </a:pPr>
+                      <a:r>
+                        <a:rPr sz="1050" b="1">
+                          <a:solidFill>
+                            <a:srgbClr val="1B2733"/>
+                          </a:solidFill>
+                          <a:latin typeface="Arial"/>
+                        </a:rPr>
+                        <a:t>Correct-proposal rate</a:t>
+                      </a:r>
+                    </a:p>
+                  </a:txBody>
+                  <a:tcPr anchor="ctr" marL="91440" marR="73152" marT="18288" marB="18288">
+                    <a:solidFill>
+                      <a:srgbClr val="F6F8FA"/>
+                    </a:solidFill>
+                  </a:tcPr>
+                </a:tc>
+                <a:tc>
+                  <a:txBody>
+                    <a:bodyPr wrap="square"/>
+                    <a:lstStyle/>
+                    <a:p>
+                      <a:pPr algn="l">
+                        <a:lnSpc>
+                          <a:spcPct val="100000"/>
+                        </a:lnSpc>
+                      </a:pPr>
+                      <a:r>
+                        <a:rPr sz="1050" b="1">
+                          <a:solidFill>
+                            <a:srgbClr val="2E9E5B"/>
+                          </a:solidFill>
+                          <a:latin typeface="Arial"/>
+                        </a:rPr>
+                        <a:t>11 / 18  (61%)</a:t>
+                      </a:r>
+                    </a:p>
+                  </a:txBody>
+                  <a:tcPr anchor="ctr" marL="91440" marR="73152" marT="18288" marB="18288">
+                    <a:solidFill>
+                      <a:srgbClr val="F6F8FA"/>
+                    </a:solidFill>
+                  </a:tcPr>
+                </a:tc>
+                <a:tc>
+                  <a:txBody>
+                    <a:bodyPr wrap="square"/>
+                    <a:lstStyle/>
+                    <a:p>
+                      <a:pPr algn="l">
+                        <a:lnSpc>
+                          <a:spcPct val="100000"/>
+                        </a:lnSpc>
+                      </a:pPr>
+                      <a:r>
+                        <a:rPr sz="1050" b="0">
+                          <a:solidFill>
+                            <a:srgbClr val="D98B22"/>
+                          </a:solidFill>
+                          <a:latin typeface="Arial"/>
+                        </a:rPr>
+                        <a:t>5 / 18  (28%)</a:t>
+                      </a:r>
+                    </a:p>
+                  </a:txBody>
+                  <a:tcPr anchor="ctr" marL="91440" marR="73152" marT="18288" marB="18288">
+                    <a:solidFill>
+                      <a:srgbClr val="F6F8FA"/>
+                    </a:solidFill>
+                  </a:tcPr>
+                </a:tc>
+              </a:tr>
+              <a:tr h="329184">
+                <a:tc>
+                  <a:txBody>
+                    <a:bodyPr wrap="square"/>
+                    <a:lstStyle/>
+                    <a:p>
+                      <a:pPr algn="l">
+                        <a:lnSpc>
+                          <a:spcPct val="100000"/>
+                        </a:lnSpc>
+                      </a:pPr>
+                      <a:r>
+                        <a:rPr sz="1050" b="1">
+                          <a:solidFill>
+                            <a:srgbClr val="1B2733"/>
+                          </a:solidFill>
+                          <a:latin typeface="Arial"/>
+                        </a:rPr>
+                        <a:t>Reliability by dataset</a:t>
+                      </a:r>
+                    </a:p>
+                  </a:txBody>
+                  <a:tcPr anchor="ctr" marL="91440" marR="73152" marT="18288" marB="18288">
+                    <a:solidFill>
+                      <a:srgbClr val="FFFFFF"/>
+                    </a:solidFill>
+                  </a:tcPr>
+                </a:tc>
+                <a:tc>
+                  <a:txBody>
+                    <a:bodyPr wrap="square"/>
+                    <a:lstStyle/>
+                    <a:p>
+                      <a:pPr algn="l">
+                        <a:lnSpc>
+                          <a:spcPct val="100000"/>
+                        </a:lnSpc>
+                      </a:pPr>
+                      <a:r>
+                        <a:rPr sz="1050" b="1">
+                          <a:solidFill>
+                            <a:srgbClr val="2E9E5B"/>
+                          </a:solidFill>
+                          <a:latin typeface="Arial"/>
+                        </a:rPr>
+                        <a:t>4/6 · 3/6 · 4/6</a:t>
+                      </a:r>
+                    </a:p>
+                  </a:txBody>
+                  <a:tcPr anchor="ctr" marL="91440" marR="73152" marT="18288" marB="18288">
+                    <a:solidFill>
+                      <a:srgbClr val="FFFFFF"/>
+                    </a:solidFill>
+                  </a:tcPr>
+                </a:tc>
+                <a:tc>
+                  <a:txBody>
+                    <a:bodyPr wrap="square"/>
+                    <a:lstStyle/>
+                    <a:p>
+                      <a:pPr algn="l">
+                        <a:lnSpc>
+                          <a:spcPct val="100000"/>
+                        </a:lnSpc>
+                      </a:pPr>
+                      <a:r>
+                        <a:rPr sz="1050" b="0">
+                          <a:solidFill>
+                            <a:srgbClr val="D98B22"/>
+                          </a:solidFill>
+                          <a:latin typeface="Arial"/>
+                        </a:rPr>
+                        <a:t>3/6 · 2/6 · 0/6</a:t>
+                      </a:r>
+                    </a:p>
+                  </a:txBody>
+                  <a:tcPr anchor="ctr" marL="91440" marR="73152" marT="18288" marB="18288">
+                    <a:solidFill>
+                      <a:srgbClr val="FFFFFF"/>
+                    </a:solidFill>
+                  </a:tcPr>
+                </a:tc>
+              </a:tr>
+              <a:tr h="329184">
+                <a:tc>
+                  <a:txBody>
+                    <a:bodyPr wrap="square"/>
+                    <a:lstStyle/>
+                    <a:p>
+                      <a:pPr algn="l">
+                        <a:lnSpc>
+                          <a:spcPct val="100000"/>
+                        </a:lnSpc>
+                      </a:pPr>
+                      <a:r>
+                        <a:rPr sz="1050" b="1">
+                          <a:solidFill>
+                            <a:srgbClr val="1B2733"/>
+                          </a:solidFill>
+                          <a:latin typeface="Arial"/>
+                        </a:rPr>
+                        <a:t>Median time-to-proposal *</a:t>
+                      </a:r>
+                    </a:p>
+                  </a:txBody>
+                  <a:tcPr anchor="ctr" marL="91440" marR="73152" marT="18288" marB="18288">
+                    <a:solidFill>
+                      <a:srgbClr val="F6F8FA"/>
+                    </a:solidFill>
+                  </a:tcPr>
+                </a:tc>
+                <a:tc>
+                  <a:txBody>
+                    <a:bodyPr wrap="square"/>
+                    <a:lstStyle/>
+                    <a:p>
+                      <a:pPr algn="l">
+                        <a:lnSpc>
+                          <a:spcPct val="100000"/>
+                        </a:lnSpc>
+                      </a:pPr>
+                      <a:r>
+                        <a:rPr sz="1050" b="1">
+                          <a:solidFill>
+                            <a:srgbClr val="2E9E5B"/>
+                          </a:solidFill>
+                          <a:latin typeface="Arial"/>
+                        </a:rPr>
+                        <a:t>~62 s</a:t>
+                      </a:r>
+                    </a:p>
+                  </a:txBody>
+                  <a:tcPr anchor="ctr" marL="91440" marR="73152" marT="18288" marB="18288">
+                    <a:solidFill>
+                      <a:srgbClr val="F6F8FA"/>
+                    </a:solidFill>
+                  </a:tcPr>
+                </a:tc>
+                <a:tc>
+                  <a:txBody>
+                    <a:bodyPr wrap="square"/>
+                    <a:lstStyle/>
+                    <a:p>
+                      <a:pPr algn="l">
+                        <a:lnSpc>
+                          <a:spcPct val="100000"/>
+                        </a:lnSpc>
+                      </a:pPr>
+                      <a:r>
+                        <a:rPr sz="1050" b="0">
+                          <a:solidFill>
+                            <a:srgbClr val="D98B22"/>
+                          </a:solidFill>
+                          <a:latin typeface="Arial"/>
+                        </a:rPr>
+                        <a:t>~78 s</a:t>
+                      </a:r>
+                    </a:p>
+                  </a:txBody>
+                  <a:tcPr anchor="ctr" marL="91440" marR="73152" marT="18288" marB="18288">
+                    <a:solidFill>
+                      <a:srgbClr val="F6F8FA"/>
+                    </a:solidFill>
+                  </a:tcPr>
+                </a:tc>
+              </a:tr>
+              <a:tr h="329184">
+                <a:tc>
+                  <a:txBody>
+                    <a:bodyPr wrap="square"/>
+                    <a:lstStyle/>
+                    <a:p>
+                      <a:pPr algn="l">
+                        <a:lnSpc>
+                          <a:spcPct val="100000"/>
+                        </a:lnSpc>
+                      </a:pPr>
+                      <a:r>
+                        <a:rPr sz="1050" b="1">
+                          <a:solidFill>
+                            <a:srgbClr val="1B2733"/>
+                          </a:solidFill>
+                          <a:latin typeface="Arial"/>
+                        </a:rPr>
+                        <a:t>LLM calls / investigation *</a:t>
+                      </a:r>
+                    </a:p>
+                  </a:txBody>
+                  <a:tcPr anchor="ctr" marL="91440" marR="73152" marT="18288" marB="18288">
+                    <a:solidFill>
+                      <a:srgbClr val="FFFFFF"/>
+                    </a:solidFill>
+                  </a:tcPr>
+                </a:tc>
+                <a:tc>
+                  <a:txBody>
+                    <a:bodyPr wrap="square"/>
+                    <a:lstStyle/>
+                    <a:p>
+                      <a:pPr algn="l">
+                        <a:lnSpc>
+                          <a:spcPct val="100000"/>
+                        </a:lnSpc>
+                      </a:pPr>
+                      <a:r>
+                        <a:rPr sz="1050" b="0">
+                          <a:solidFill>
+                            <a:srgbClr val="1B2733"/>
+                          </a:solidFill>
+                          <a:latin typeface="Arial"/>
+                        </a:rPr>
+                        <a:t>~19</a:t>
+                      </a:r>
+                    </a:p>
+                  </a:txBody>
+                  <a:tcPr anchor="ctr" marL="91440" marR="73152" marT="18288" marB="18288">
+                    <a:solidFill>
+                      <a:srgbClr val="FFFFFF"/>
+                    </a:solidFill>
+                  </a:tcPr>
+                </a:tc>
+                <a:tc>
+                  <a:txBody>
+                    <a:bodyPr wrap="square"/>
+                    <a:lstStyle/>
+                    <a:p>
+                      <a:pPr algn="l">
+                        <a:lnSpc>
+                          <a:spcPct val="100000"/>
+                        </a:lnSpc>
+                      </a:pPr>
+                      <a:r>
+                        <a:rPr sz="1050" b="1">
+                          <a:solidFill>
+                            <a:srgbClr val="2E9E5B"/>
+                          </a:solidFill>
+                          <a:latin typeface="Arial"/>
+                        </a:rPr>
+                        <a:t>~9</a:t>
+                      </a:r>
+                    </a:p>
+                  </a:txBody>
+                  <a:tcPr anchor="ctr" marL="91440" marR="73152" marT="18288" marB="18288">
+                    <a:solidFill>
+                      <a:srgbClr val="FFFFFF"/>
+                    </a:solidFill>
+                  </a:tcPr>
+                </a:tc>
+              </a:tr>
+              <a:tr h="329184">
+                <a:tc>
+                  <a:txBody>
+                    <a:bodyPr wrap="square"/>
+                    <a:lstStyle/>
+                    <a:p>
+                      <a:pPr algn="l">
+                        <a:lnSpc>
+                          <a:spcPct val="100000"/>
+                        </a:lnSpc>
+                      </a:pPr>
+                      <a:r>
+                        <a:rPr sz="1050" b="1">
+                          <a:solidFill>
+                            <a:srgbClr val="1B2733"/>
+                          </a:solidFill>
+                          <a:latin typeface="Arial"/>
+                        </a:rPr>
+                        <a:t>Cost per LLM call *</a:t>
+                      </a:r>
+                    </a:p>
+                  </a:txBody>
+                  <a:tcPr anchor="ctr" marL="91440" marR="73152" marT="18288" marB="18288">
+                    <a:solidFill>
+                      <a:srgbClr val="F6F8FA"/>
+                    </a:solidFill>
+                  </a:tcPr>
+                </a:tc>
+                <a:tc>
+                  <a:txBody>
+                    <a:bodyPr wrap="square"/>
+                    <a:lstStyle/>
+                    <a:p>
+                      <a:pPr algn="l">
+                        <a:lnSpc>
+                          <a:spcPct val="100000"/>
+                        </a:lnSpc>
+                      </a:pPr>
+                      <a:r>
+                        <a:rPr sz="1050" b="1">
+                          <a:solidFill>
+                            <a:srgbClr val="2E9E5B"/>
+                          </a:solidFill>
+                          <a:latin typeface="Arial"/>
+                        </a:rPr>
+                        <a:t>~3 s  (small contexts)</a:t>
+                      </a:r>
+                    </a:p>
+                  </a:txBody>
+                  <a:tcPr anchor="ctr" marL="91440" marR="73152" marT="18288" marB="18288">
+                    <a:solidFill>
+                      <a:srgbClr val="F6F8FA"/>
+                    </a:solidFill>
+                  </a:tcPr>
+                </a:tc>
+                <a:tc>
+                  <a:txBody>
+                    <a:bodyPr wrap="square"/>
+                    <a:lstStyle/>
+                    <a:p>
+                      <a:pPr algn="l">
+                        <a:lnSpc>
+                          <a:spcPct val="100000"/>
+                        </a:lnSpc>
+                      </a:pPr>
+                      <a:r>
+                        <a:rPr sz="1050" b="0">
+                          <a:solidFill>
+                            <a:srgbClr val="1B2733"/>
+                          </a:solidFill>
+                          <a:latin typeface="Arial"/>
+                        </a:rPr>
+                        <a:t>~9 s  (one big context)</a:t>
+                      </a:r>
+                    </a:p>
+                  </a:txBody>
+                  <a:tcPr anchor="ctr" marL="91440" marR="73152" marT="18288" marB="18288">
+                    <a:solidFill>
+                      <a:srgbClr val="F6F8FA"/>
+                    </a:solidFill>
+                  </a:tcPr>
+                </a:tc>
+              </a:tr>
+            </a:tbl>
+          </a:graphicData>
+        </a:graphic>
+      </p:graphicFrame>
+      <p:sp>
+        <p:nvSpPr>
+          <p:cNvPr id="8" name="TextBox 7"/>
+          <p:cNvSpPr txBox="1"/>
+          <p:nvPr/>
+        </p:nvSpPr>
+        <p:spPr>
+          <a:xfrm>
+            <a:off x="566928" y="3840479"/>
+            <a:ext cx="11057839" cy="237744"/>
+          </a:xfrm>
+          <a:prstGeom prst="rect">
+            <a:avLst/>
+          </a:prstGeom>
+          <a:noFill/>
+        </p:spPr>
+        <p:txBody>
+          <a:bodyPr wrap="square" anchor="t" lIns="0" rIns="0" tIns="0" bIns="0">
+            <a:noAutofit/>
+          </a:bodyPr>
+          <a:lstStyle/>
+          <a:p>
+            <a:pPr algn="l">
+              <a:lnSpc>
+                <a:spcPct val="100000"/>
+              </a:lnSpc>
+              <a:spcBef>
+                <a:spcPts val="0"/>
+              </a:spcBef>
+              <a:spcAft>
+                <a:spcPts val="600"/>
+              </a:spcAft>
+            </a:pPr>
+            <a:r>
+              <a:rPr sz="850" b="0">
+                <a:solidFill>
+                  <a:srgbClr val="6B7885"/>
+                </a:solidFill>
+                <a:latin typeface="Arial"/>
+              </a:rPr>
+              <a:t>* valid runs only — failed runs bailed out faster but produced no proposal, so timing them would flatter the loser.</a:t>
+            </a:r>
+          </a:p>
+        </p:txBody>
+      </p:sp>
+      <p:sp>
+        <p:nvSpPr>
+          <p:cNvPr id="9" name="Rounded Rectangle 8"/>
           <p:cNvSpPr/>
           <p:nvPr/>
         </p:nvSpPr>
         <p:spPr>
           <a:xfrm>
-            <a:off x="566928" y="1828800"/>
-            <a:ext cx="11057839" cy="822960"/>
+            <a:off x="566928" y="4133087"/>
+            <a:ext cx="11057839" cy="1810512"/>
           </a:xfrm>
           <a:prstGeom prst="roundRect">
             <a:avLst>
@@ -48035,11 +48605,11 @@
             </a:avLst>
           </a:prstGeom>
           <a:solidFill>
-            <a:srgbClr val="FFEBDA"/>
+            <a:srgbClr val="F6F8FA"/>
           </a:solidFill>
           <a:ln w="12700">
             <a:solidFill>
-              <a:srgbClr val="FF7300"/>
+              <a:srgbClr val="DCE3E9"/>
             </a:solidFill>
           </a:ln>
           <a:effectLst/>
@@ -48068,72 +48638,23 @@
       </p:sp>
       <p:sp>
         <p:nvSpPr>
-          <p:cNvPr id="8" name="TextBox 7"/>
-          <p:cNvSpPr txBox="1"/>
-          <p:nvPr/>
-        </p:nvSpPr>
-        <p:spPr>
-          <a:xfrm>
-            <a:off x="841247" y="1828800"/>
-            <a:ext cx="10509199" cy="822960"/>
-          </a:xfrm>
-          <a:prstGeom prst="rect">
-            <a:avLst/>
-          </a:prstGeom>
-          <a:noFill/>
-        </p:spPr>
-        <p:txBody>
-          <a:bodyPr wrap="square" anchor="ctr" lIns="0" rIns="0" tIns="0" bIns="0">
-            <a:noAutofit/>
-          </a:bodyPr>
-          <a:lstStyle/>
-          <a:p>
-            <a:pPr algn="ctr">
-              <a:lnSpc>
-                <a:spcPct val="100000"/>
-              </a:lnSpc>
-              <a:spcBef>
-                <a:spcPts val="0"/>
-              </a:spcBef>
-              <a:spcAft>
-                <a:spcPts val="600"/>
-              </a:spcAft>
-            </a:pPr>
-            <a:r>
-              <a:rPr sz="1400" b="1">
-                <a:solidFill>
-                  <a:srgbClr val="C85A00"/>
-                </a:solidFill>
-                <a:latin typeface="Arial"/>
-              </a:rPr>
-              <a:t>◆  PLACEHOLDER — to complete together after the scorecard discussion</a:t>
-            </a:r>
-          </a:p>
-        </p:txBody>
-      </p:sp>
-      <p:sp>
-        <p:nvSpPr>
-          <p:cNvPr id="9" name="Rounded Rectangle 8"/>
+          <p:cNvPr id="10" name="Rectangle 9"/>
           <p:cNvSpPr/>
           <p:nvPr/>
         </p:nvSpPr>
         <p:spPr>
           <a:xfrm>
-            <a:off x="566928" y="2926080"/>
-            <a:ext cx="5346039" cy="2926080"/>
-          </a:xfrm>
-          <a:prstGeom prst="roundRect">
-            <a:avLst>
-              <a:gd name="adj" fmla="val 4500"/>
-            </a:avLst>
+            <a:off x="768096" y="4315967"/>
+            <a:ext cx="82296" cy="237744"/>
+          </a:xfrm>
+          <a:prstGeom prst="rect">
+            <a:avLst/>
           </a:prstGeom>
           <a:solidFill>
-            <a:srgbClr val="E0F1F5"/>
+            <a:srgbClr val="FF7300"/>
           </a:solidFill>
-          <a:ln w="12700">
-            <a:solidFill>
-              <a:srgbClr val="0E8FA8"/>
-            </a:solidFill>
+          <a:ln>
+            <a:noFill/>
           </a:ln>
           <a:effectLst/>
         </p:spPr>
@@ -48161,58 +48682,14 @@
       </p:sp>
       <p:sp>
         <p:nvSpPr>
-          <p:cNvPr id="10" name="Rectangle 9"/>
-          <p:cNvSpPr/>
-          <p:nvPr/>
-        </p:nvSpPr>
-        <p:spPr>
-          <a:xfrm>
-            <a:off x="768096" y="3172968"/>
-            <a:ext cx="82296" cy="237744"/>
-          </a:xfrm>
-          <a:prstGeom prst="rect">
-            <a:avLst/>
-          </a:prstGeom>
-          <a:solidFill>
-            <a:srgbClr val="0A6E82"/>
-          </a:solidFill>
-          <a:ln>
-            <a:noFill/>
-          </a:ln>
-          <a:effectLst/>
-        </p:spPr>
-        <p:style>
-          <a:lnRef idx="1">
-            <a:schemeClr val="accent1"/>
-          </a:lnRef>
-          <a:fillRef idx="3">
-            <a:schemeClr val="accent1"/>
-          </a:fillRef>
-          <a:effectRef idx="2">
-            <a:schemeClr val="accent1"/>
-          </a:effectRef>
-          <a:fontRef idx="minor">
-            <a:schemeClr val="lt1"/>
-          </a:fontRef>
-        </p:style>
-        <p:txBody>
-          <a:bodyPr rtlCol="0" anchor="ctr"/>
-          <a:lstStyle/>
-          <a:p>
-            <a:pPr algn="ctr"/>
-          </a:p>
-        </p:txBody>
-      </p:sp>
-      <p:sp>
-        <p:nvSpPr>
           <p:cNvPr id="11" name="TextBox 10"/>
           <p:cNvSpPr txBox="1"/>
           <p:nvPr/>
         </p:nvSpPr>
         <p:spPr>
           <a:xfrm>
-            <a:off x="969264" y="3136392"/>
-            <a:ext cx="4742535" cy="310896"/>
+            <a:off x="969264" y="4279392"/>
+            <a:ext cx="10454335" cy="310896"/>
           </a:xfrm>
           <a:prstGeom prst="rect">
             <a:avLst/>
@@ -48243,7 +48720,7 @@
                 </a:solidFill>
                 <a:latin typeface="Arial"/>
               </a:rPr>
-              <a:t>Lean Ballerina + Proxy if…</a:t>
+              <a:t>What the data says — both my architecture-first predictions were wrong</a:t>
             </a:r>
           </a:p>
         </p:txBody>
@@ -48256,8 +48733,8 @@
         </p:nvSpPr>
         <p:spPr>
           <a:xfrm>
-            <a:off x="841247" y="3639312"/>
-            <a:ext cx="4797399" cy="2103120"/>
+            <a:off x="841247" y="4700016"/>
+            <a:ext cx="10509199" cy="1188720"/>
           </a:xfrm>
           <a:prstGeom prst="rect">
             <a:avLst/>
@@ -48272,215 +48749,168 @@
           <a:p>
             <a:pPr algn="l" marL="256032" indent="-256032">
               <a:lnSpc>
-                <a:spcPct val="106000"/>
-              </a:lnSpc>
-              <a:spcBef>
-                <a:spcPts val="0"/>
-              </a:spcBef>
-              <a:spcAft>
-                <a:spcPts val="900"/>
+                <a:spcPct val="104000"/>
+              </a:lnSpc>
+              <a:spcBef>
+                <a:spcPts val="0"/>
+              </a:spcBef>
+              <a:spcAft>
+                <a:spcPts val="400"/>
               </a:spcAft>
               <a:buClr>
-                <a:srgbClr val="0E8FA8"/>
+                <a:srgbClr val="FF7300"/>
               </a:buClr>
               <a:buFont typeface="Arial"/>
               <a:buChar char="▪"/>
             </a:pPr>
             <a:r>
-              <a:rPr sz="1150" b="0">
+              <a:rPr sz="950" b="1">
                 <a:solidFill>
                   <a:srgbClr val="1B2733"/>
                 </a:solidFill>
                 <a:latin typeface="Arial"/>
               </a:rPr>
-              <a:t>You're standardizing on WSO2 AMP as the agent platform.</a:t>
+              <a:t>Faster = LangChain  </a:t>
+            </a:r>
+            <a:r>
+              <a:rPr sz="950" b="0">
+                <a:solidFill>
+                  <a:srgbClr val="1B2733"/>
+                </a:solidFill>
+                <a:latin typeface="Arial"/>
+              </a:rPr>
+              <a:t>(62 vs 78 s median). I'd predicted Ballerina (fewer calls) — but its ~9 calls are each ~3× heavier (one big, growing context), losing to LangChain's more-but-cheaper calls on small decomposed contexts.</a:t>
             </a:r>
           </a:p>
           <a:p>
             <a:pPr algn="l" marL="256032" indent="-256032">
               <a:lnSpc>
-                <a:spcPct val="106000"/>
-              </a:lnSpc>
-              <a:spcBef>
-                <a:spcPts val="0"/>
-              </a:spcBef>
-              <a:spcAft>
-                <a:spcPts val="900"/>
+                <a:spcPct val="104000"/>
+              </a:lnSpc>
+              <a:spcBef>
+                <a:spcPts val="0"/>
+              </a:spcBef>
+              <a:spcAft>
+                <a:spcPts val="400"/>
               </a:spcAft>
               <a:buClr>
-                <a:srgbClr val="0E8FA8"/>
+                <a:srgbClr val="FF7300"/>
               </a:buClr>
               <a:buFont typeface="Arial"/>
               <a:buChar char="▪"/>
             </a:pPr>
             <a:r>
-              <a:rPr sz="1150" b="0">
+              <a:rPr sz="950" b="1">
                 <a:solidFill>
                   <a:srgbClr val="1B2733"/>
                 </a:solidFill>
                 <a:latin typeface="Arial"/>
               </a:rPr>
-              <a:t>You want the fewest moving parts to operate and audit.</a:t>
+              <a:t>More reliable = LangChain, ~2×  </a:t>
+            </a:r>
+            <a:r>
+              <a:rPr sz="950" b="0">
+                <a:solidFill>
+                  <a:srgbClr val="1B2733"/>
+                </a:solidFill>
+                <a:latin typeface="Arial"/>
+              </a:rPr>
+              <a:t>(61% vs 28%; Ballerina went 0/6 in one dataset). Opposite my guess too: decomposing into short sub-tasks keeps the 14B on-track better than one long single-agent protocol + discover_tools overhead.</a:t>
             </a:r>
           </a:p>
           <a:p>
             <a:pPr algn="l" marL="256032" indent="-256032">
               <a:lnSpc>
-                <a:spcPct val="106000"/>
-              </a:lnSpc>
-              <a:spcBef>
-                <a:spcPts val="0"/>
-              </a:spcBef>
-              <a:spcAft>
-                <a:spcPts val="900"/>
+                <a:spcPct val="104000"/>
+              </a:lnSpc>
+              <a:spcBef>
+                <a:spcPts val="0"/>
+              </a:spcBef>
+              <a:spcAft>
+                <a:spcPts val="400"/>
               </a:spcAft>
               <a:buClr>
-                <a:srgbClr val="0E8FA8"/>
+                <a:srgbClr val="FF7300"/>
               </a:buClr>
               <a:buFont typeface="Arial"/>
               <a:buChar char="▪"/>
             </a:pPr>
             <a:r>
-              <a:rPr sz="1150" b="0">
+              <a:rPr sz="950" b="1">
                 <a:solidFill>
                   <a:srgbClr val="1B2733"/>
                 </a:solidFill>
                 <a:latin typeface="Arial"/>
               </a:rPr>
-              <a:t>Single-context correlation fidelity is paramount.</a:t>
-            </a:r>
-          </a:p>
-          <a:p>
-            <a:pPr algn="l" marL="256032" indent="-256032">
-              <a:lnSpc>
-                <a:spcPct val="106000"/>
-              </a:lnSpc>
-              <a:spcBef>
-                <a:spcPts val="0"/>
-              </a:spcBef>
-              <a:spcAft>
-                <a:spcPts val="900"/>
-              </a:spcAft>
-              <a:buClr>
-                <a:srgbClr val="0E8FA8"/>
-              </a:buClr>
-              <a:buFont typeface="Arial"/>
-              <a:buChar char="▪"/>
-            </a:pPr>
-            <a:r>
-              <a:rPr sz="1150" b="0">
+              <a:t>Caveat + what still stands  </a:t>
+            </a:r>
+            <a:r>
+              <a:rPr sz="950" b="0">
                 <a:solidFill>
                   <a:srgbClr val="1B2733"/>
                 </a:solidFill>
                 <a:latin typeface="Arial"/>
               </a:rPr>
-              <a:t>A niche language is acceptable for a small platform team.</a:t>
-            </a:r>
-          </a:p>
-        </p:txBody>
-      </p:sp>
-      <p:sp>
-        <p:nvSpPr>
-          <p:cNvPr id="13" name="Rounded Rectangle 12"/>
-          <p:cNvSpPr/>
-          <p:nvPr/>
-        </p:nvSpPr>
-        <p:spPr>
-          <a:xfrm>
-            <a:off x="6278727" y="2926080"/>
-            <a:ext cx="5346039" cy="2926080"/>
-          </a:xfrm>
-          <a:prstGeom prst="roundRect">
-            <a:avLst>
-              <a:gd name="adj" fmla="val 4500"/>
-            </a:avLst>
-          </a:prstGeom>
-          <a:solidFill>
-            <a:srgbClr val="ECE8FC"/>
-          </a:solidFill>
-          <a:ln w="12700">
-            <a:solidFill>
-              <a:srgbClr val="6A4CE0"/>
-            </a:solidFill>
-          </a:ln>
-          <a:effectLst/>
-        </p:spPr>
-        <p:style>
-          <a:lnRef idx="1">
-            <a:schemeClr val="accent1"/>
-          </a:lnRef>
-          <a:fillRef idx="3">
-            <a:schemeClr val="accent1"/>
-          </a:fillRef>
-          <a:effectRef idx="2">
-            <a:schemeClr val="accent1"/>
-          </a:effectRef>
-          <a:fontRef idx="minor">
-            <a:schemeClr val="lt1"/>
-          </a:fontRef>
-        </p:style>
-        <p:txBody>
-          <a:bodyPr rtlCol="0" anchor="ctr"/>
-          <a:lstStyle/>
-          <a:p>
-            <a:pPr algn="ctr"/>
-          </a:p>
-        </p:txBody>
-      </p:sp>
-      <p:sp>
-        <p:nvSpPr>
-          <p:cNvPr id="14" name="Rectangle 13"/>
-          <p:cNvSpPr/>
-          <p:nvPr/>
-        </p:nvSpPr>
-        <p:spPr>
-          <a:xfrm>
-            <a:off x="6479895" y="3172968"/>
-            <a:ext cx="82296" cy="237744"/>
-          </a:xfrm>
-          <a:prstGeom prst="rect">
-            <a:avLst/>
-          </a:prstGeom>
-          <a:solidFill>
-            <a:srgbClr val="5138C0"/>
-          </a:solidFill>
-          <a:ln>
-            <a:noFill/>
-          </a:ln>
-          <a:effectLst/>
-        </p:spPr>
-        <p:style>
-          <a:lnRef idx="1">
-            <a:schemeClr val="accent1"/>
-          </a:lnRef>
-          <a:fillRef idx="3">
-            <a:schemeClr val="accent1"/>
-          </a:fillRef>
-          <a:effectRef idx="2">
-            <a:schemeClr val="accent1"/>
-          </a:effectRef>
-          <a:fontRef idx="minor">
-            <a:schemeClr val="lt1"/>
-          </a:fontRef>
-        </p:style>
-        <p:txBody>
-          <a:bodyPr rtlCol="0" anchor="ctr"/>
-          <a:lstStyle/>
-          <a:p>
-            <a:pPr algn="ctr"/>
-          </a:p>
-        </p:txBody>
-      </p:sp>
-      <p:sp>
-        <p:nvSpPr>
-          <p:cNvPr id="15" name="TextBox 14"/>
+              <a:t>Both are sub-production on a local model → use a cloud model for demo/prod. Qualitative edges unchanged: Ballerina = fewer parts + WSO2-native; LangChain = code-level gate + Python familiarity.</a:t>
+            </a:r>
+          </a:p>
+        </p:txBody>
+      </p:sp>
+      <p:sp>
+        <p:nvSpPr>
+          <p:cNvPr id="13" name="TextBox 12"/>
           <p:cNvSpPr txBox="1"/>
           <p:nvPr/>
         </p:nvSpPr>
         <p:spPr>
           <a:xfrm>
-            <a:off x="6681063" y="3136392"/>
-            <a:ext cx="4742535" cy="310896"/>
+            <a:off x="566928" y="6035040"/>
+            <a:ext cx="11057839" cy="365760"/>
+          </a:xfrm>
+          <a:prstGeom prst="rect">
+            <a:avLst/>
+          </a:prstGeom>
+          <a:noFill/>
+        </p:spPr>
+        <p:txBody>
+          <a:bodyPr wrap="square" anchor="t" lIns="0" rIns="0" tIns="0" bIns="0">
+            <a:noAutofit/>
+          </a:bodyPr>
+          <a:lstStyle/>
+          <a:p>
+            <a:pPr algn="l">
+              <a:lnSpc>
+                <a:spcPct val="112000"/>
+              </a:lnSpc>
+              <a:spcBef>
+                <a:spcPts val="0"/>
+              </a:spcBef>
+              <a:spcAft>
+                <a:spcPts val="600"/>
+              </a:spcAft>
+            </a:pPr>
+            <a:r>
+              <a:rPr sz="800" b="0">
+                <a:solidFill>
+                  <a:srgbClr val="6B7885"/>
+                </a:solidFill>
+                <a:latin typeface="Arial"/>
+              </a:rPr>
+              <a:t>Method: identical qwen2.5:14b-instruct on Ollama; 3 datasets × 6 measured runs each (warm-up discarded per dataset); stacks run sequentially, never concurrent; mock MCP backends; same chaos + payload. Latency via curl, LLM calls via the Ollama access log.</a:t>
+            </a:r>
+          </a:p>
+        </p:txBody>
+      </p:sp>
+      <p:sp>
+        <p:nvSpPr>
+          <p:cNvPr id="14" name="TextBox 13"/>
+          <p:cNvSpPr txBox="1"/>
+          <p:nvPr/>
+        </p:nvSpPr>
+        <p:spPr>
+          <a:xfrm>
+            <a:off x="566928" y="6510528"/>
+            <a:ext cx="9777679" cy="256032"/>
           </a:xfrm>
           <a:prstGeom prst="rect">
             <a:avLst/>
@@ -48505,182 +48935,6 @@
               </a:spcAft>
             </a:pPr>
             <a:r>
-              <a:rPr sz="1350" b="1">
-                <a:solidFill>
-                  <a:srgbClr val="1B2733"/>
-                </a:solidFill>
-                <a:latin typeface="Arial"/>
-              </a:rPr>
-              <a:t>Lean LangChain + A2A if…</a:t>
-            </a:r>
-          </a:p>
-        </p:txBody>
-      </p:sp>
-      <p:sp>
-        <p:nvSpPr>
-          <p:cNvPr id="16" name="TextBox 15"/>
-          <p:cNvSpPr txBox="1"/>
-          <p:nvPr/>
-        </p:nvSpPr>
-        <p:spPr>
-          <a:xfrm>
-            <a:off x="6553047" y="3639312"/>
-            <a:ext cx="4797399" cy="2103120"/>
-          </a:xfrm>
-          <a:prstGeom prst="rect">
-            <a:avLst/>
-          </a:prstGeom>
-          <a:noFill/>
-        </p:spPr>
-        <p:txBody>
-          <a:bodyPr wrap="square" anchor="t" lIns="0" rIns="0" tIns="0" bIns="0">
-            <a:noAutofit/>
-          </a:bodyPr>
-          <a:lstStyle/>
-          <a:p>
-            <a:pPr algn="l" marL="256032" indent="-256032">
-              <a:lnSpc>
-                <a:spcPct val="106000"/>
-              </a:lnSpc>
-              <a:spcBef>
-                <a:spcPts val="0"/>
-              </a:spcBef>
-              <a:spcAft>
-                <a:spcPts val="900"/>
-              </a:spcAft>
-              <a:buClr>
-                <a:srgbClr val="6A4CE0"/>
-              </a:buClr>
-              <a:buFont typeface="Arial"/>
-              <a:buChar char="▪"/>
-            </a:pPr>
-            <a:r>
-              <a:rPr sz="1150" b="0">
-                <a:solidFill>
-                  <a:srgbClr val="1B2733"/>
-                </a:solidFill>
-                <a:latin typeface="Arial"/>
-              </a:rPr>
-              <a:t>Your teams already live in Python / LangChain.</a:t>
-            </a:r>
-          </a:p>
-          <a:p>
-            <a:pPr algn="l" marL="256032" indent="-256032">
-              <a:lnSpc>
-                <a:spcPct val="106000"/>
-              </a:lnSpc>
-              <a:spcBef>
-                <a:spcPts val="0"/>
-              </a:spcBef>
-              <a:spcAft>
-                <a:spcPts val="900"/>
-              </a:spcAft>
-              <a:buClr>
-                <a:srgbClr val="6A4CE0"/>
-              </a:buClr>
-              <a:buFont typeface="Arial"/>
-              <a:buChar char="▪"/>
-            </a:pPr>
-            <a:r>
-              <a:rPr sz="1150" b="0">
-                <a:solidFill>
-                  <a:srgbClr val="1B2733"/>
-                </a:solidFill>
-                <a:latin typeface="Arial"/>
-              </a:rPr>
-              <a:t>A code-enforced approval gate is a compliance must-have.</a:t>
-            </a:r>
-          </a:p>
-          <a:p>
-            <a:pPr algn="l" marL="256032" indent="-256032">
-              <a:lnSpc>
-                <a:spcPct val="106000"/>
-              </a:lnSpc>
-              <a:spcBef>
-                <a:spcPts val="0"/>
-              </a:spcBef>
-              <a:spcAft>
-                <a:spcPts val="900"/>
-              </a:spcAft>
-              <a:buClr>
-                <a:srgbClr val="6A4CE0"/>
-              </a:buClr>
-              <a:buFont typeface="Arial"/>
-              <a:buChar char="▪"/>
-            </a:pPr>
-            <a:r>
-              <a:rPr sz="1150" b="0">
-                <a:solidFill>
-                  <a:srgbClr val="1B2733"/>
-                </a:solidFill>
-                <a:latin typeface="Arial"/>
-              </a:rPr>
-              <a:t>You expect many platforms / trust domains (A2A scales out).</a:t>
-            </a:r>
-          </a:p>
-          <a:p>
-            <a:pPr algn="l" marL="256032" indent="-256032">
-              <a:lnSpc>
-                <a:spcPct val="106000"/>
-              </a:lnSpc>
-              <a:spcBef>
-                <a:spcPts val="0"/>
-              </a:spcBef>
-              <a:spcAft>
-                <a:spcPts val="900"/>
-              </a:spcAft>
-              <a:buClr>
-                <a:srgbClr val="6A4CE0"/>
-              </a:buClr>
-              <a:buFont typeface="Arial"/>
-              <a:buChar char="▪"/>
-            </a:pPr>
-            <a:r>
-              <a:rPr sz="1150" b="0">
-                <a:solidFill>
-                  <a:srgbClr val="1B2733"/>
-                </a:solidFill>
-                <a:latin typeface="Arial"/>
-              </a:rPr>
-              <a:t>You're comfortable operating a distributed agent system.</a:t>
-            </a:r>
-          </a:p>
-        </p:txBody>
-      </p:sp>
-      <p:sp>
-        <p:nvSpPr>
-          <p:cNvPr id="17" name="TextBox 16"/>
-          <p:cNvSpPr txBox="1"/>
-          <p:nvPr/>
-        </p:nvSpPr>
-        <p:spPr>
-          <a:xfrm>
-            <a:off x="566928" y="6510528"/>
-            <a:ext cx="9777679" cy="256032"/>
-          </a:xfrm>
-          <a:prstGeom prst="rect">
-            <a:avLst/>
-          </a:prstGeom>
-          <a:noFill/>
-        </p:spPr>
-        <p:txBody>
-          <a:bodyPr wrap="square" anchor="ctr" lIns="0" rIns="0" tIns="0" bIns="0">
-            <a:noAutofit/>
-          </a:bodyPr>
-          <a:lstStyle/>
-          <a:p>
-            <a:pPr algn="l">
-              <a:lnSpc>
-                <a:spcPct val="100000"/>
-              </a:lnSpc>
-              <a:spcBef>
-                <a:spcPts val="0"/>
-              </a:spcBef>
-              <a:spcAft>
-                <a:spcPts val="600"/>
-              </a:spcAft>
-            </a:pPr>
-            <a:r>
               <a:rPr sz="800" b="0">
                 <a:solidFill>
                   <a:srgbClr val="9AA5B1"/>
@@ -48694,7 +48948,7 @@
       </p:sp>
       <p:sp>
         <p:nvSpPr>
-          <p:cNvPr id="18" name="TextBox 17"/>
+          <p:cNvPr id="15" name="TextBox 14"/>
           <p:cNvSpPr txBox="1"/>
           <p:nvPr/>
         </p:nvSpPr>

--- a/presentation/DevOps-OverSight-Agent-POC-Review.pptx
+++ b/presentation/DevOps-OverSight-Agent-POC-Review.pptx
@@ -2579,7 +2579,7 @@
           <a:lstStyle/>
           <a:p>
             <a:r>
-              <a:t>This slide is filled in with real measurement — 18 runs per stack, three datasets of six — and I want to be transparent that the data corrected me on BOTH of my architecture-first predictions. I'd said Ballerina would be faster and more reliable. On the creds-free local model, qwen2.5:14b, the opposite held. Faster: LangChain, ~62-second median time-to-proposal versus ~78 for Ballerina. The reason is the interesting part — Ballerina makes about half as many LLM calls (nine versus nineteen), but each is roughly three times heavier because the single agent carries one large, growing context (the ten-step protocol plus every lazy-loaded tool schema), while LangChain's decomposed agents each keep a small context, so their calls are cheap even though there are more of them. More reliable: also LangChain, and clearly — 61 percent correct-proposal rate versus 28 percent, with Ballerina producing ZERO valid runs in one entire dataset. That flips my 'single agent = more reliable' intuition: decomposing into short, focused sub-tasks keeps a weak model on-track far better than driving one long single-agent protocol with discover_tools overhead, where the 14B tends to declare victory early after correlating a trace. The honest headline for the room: on the local model LangChain won both axes — but both are still sub-production reliability, so for a real demo use a cloud model, where both should climb toward the high 90s and the gap may change. The qualitative scorecard trade-offs are unchanged, so the final verdict still weighs the client's team and governance context — now on top of measured runtime, not my inference.</a:t>
+              <a:t>We measured both architectures on two very different models — the creds-free local qwen2.5:14b and Anthropic's Claude Haiku 4.5 — 18 runs each, three datasets of six, run sequentially. Two findings dominate. First, model choice matters more than architecture for reliability: on the local 14B, correct-proposal rates were a shaky 28 to 61 percent (the model tends to narrate the tool call it's about to make and then quit without making it); on Haiku, BOTH stacks hit 100 percent, 18 for 18. So the local flakiness is a model problem, full stop — don't ship the 14B. Second, and this is the fun one: the speed winner flips with the model. On the slow local model, LangChain was faster (62 vs 78 seconds) because Ballerina's single big growing context makes each of its calls expensive. On the fast cloud model, that per-call penalty disappears and raw call COUNT dominates — so Ballerina's roughly nine calls beat LangChain's nineteen network round-trips, and Ballerina is about 2.6 times faster, 14 seconds versus 36. My original architecture argument — fewer round-trips is faster — was right after all, but only once inference is fast enough that network round-trips, not per-call compute, are the bottleneck. The practical upshot: on the model you'd actually deploy, both are 100 percent reliable and Ballerina is meaningfully faster, so runtime stops being the deciding factor and the qualitative scorecard — WSO2-native and fewer moving parts versus a code-level gate and Python familiarity — decides it on the client's context.</a:t>
             </a:r>
           </a:p>
         </p:txBody>
@@ -47924,7 +47924,7 @@
                 </a:solidFill>
                 <a:latin typeface="Arial"/>
               </a:rPr>
-              <a:t>COMPARISON · MEASURED A/B — 18 RUNS</a:t>
+              <a:t>COMPARISON · MEASURED A/B — LOCAL VS CLOUD</a:t>
             </a:r>
           </a:p>
         </p:txBody>
@@ -47969,7 +47969,7 @@
                 </a:solidFill>
                 <a:latin typeface="Arial"/>
               </a:rPr>
-              <a:t>Recommendation — measured, not guessed</a:t>
+              <a:t>Recommendation — measured on two models</a:t>
             </a:r>
           </a:p>
         </p:txBody>
@@ -48018,17 +48018,107 @@
           </a:p>
         </p:txBody>
       </p:sp>
+      <p:sp>
+        <p:nvSpPr>
+          <p:cNvPr id="7" name="TextBox 6"/>
+          <p:cNvSpPr txBox="1"/>
+          <p:nvPr/>
+        </p:nvSpPr>
+        <p:spPr>
+          <a:xfrm>
+            <a:off x="566928" y="1737360"/>
+            <a:ext cx="5300319" cy="274320"/>
+          </a:xfrm>
+          <a:prstGeom prst="rect">
+            <a:avLst/>
+          </a:prstGeom>
+          <a:noFill/>
+        </p:spPr>
+        <p:txBody>
+          <a:bodyPr wrap="square" anchor="ctr" lIns="0" rIns="0" tIns="0" bIns="0">
+            <a:noAutofit/>
+          </a:bodyPr>
+          <a:lstStyle/>
+          <a:p>
+            <a:pPr algn="l">
+              <a:lnSpc>
+                <a:spcPct val="100000"/>
+              </a:lnSpc>
+              <a:spcBef>
+                <a:spcPts val="0"/>
+              </a:spcBef>
+              <a:spcAft>
+                <a:spcPts val="600"/>
+              </a:spcAft>
+            </a:pPr>
+            <a:r>
+              <a:rPr sz="1100" b="1">
+                <a:solidFill>
+                  <a:srgbClr val="3E4C59"/>
+                </a:solidFill>
+                <a:latin typeface="Arial"/>
+              </a:rPr>
+              <a:t>LOCAL  —  qwen2.5:14b (Ollama)</a:t>
+            </a:r>
+          </a:p>
+        </p:txBody>
+      </p:sp>
+      <p:sp>
+        <p:nvSpPr>
+          <p:cNvPr id="8" name="TextBox 7"/>
+          <p:cNvSpPr txBox="1"/>
+          <p:nvPr/>
+        </p:nvSpPr>
+        <p:spPr>
+          <a:xfrm>
+            <a:off x="6324447" y="1737360"/>
+            <a:ext cx="5300319" cy="274320"/>
+          </a:xfrm>
+          <a:prstGeom prst="rect">
+            <a:avLst/>
+          </a:prstGeom>
+          <a:noFill/>
+        </p:spPr>
+        <p:txBody>
+          <a:bodyPr wrap="square" anchor="ctr" lIns="0" rIns="0" tIns="0" bIns="0">
+            <a:noAutofit/>
+          </a:bodyPr>
+          <a:lstStyle/>
+          <a:p>
+            <a:pPr algn="l">
+              <a:lnSpc>
+                <a:spcPct val="100000"/>
+              </a:lnSpc>
+              <a:spcBef>
+                <a:spcPts val="0"/>
+              </a:spcBef>
+              <a:spcAft>
+                <a:spcPts val="600"/>
+              </a:spcAft>
+            </a:pPr>
+            <a:r>
+              <a:rPr sz="1100" b="1">
+                <a:solidFill>
+                  <a:srgbClr val="C85A00"/>
+                </a:solidFill>
+                <a:latin typeface="Arial"/>
+              </a:rPr>
+              <a:t>CLOUD  —  Claude Haiku 4.5</a:t>
+            </a:r>
+          </a:p>
+        </p:txBody>
+      </p:sp>
       <p:graphicFrame>
         <p:nvGraphicFramePr>
-          <p:cNvPr id="7" name="Table 6"/>
+          <p:cNvPr id="9" name="Table 8"/>
           <p:cNvGraphicFramePr>
             <a:graphicFrameLocks noGrp="1"/>
           </p:cNvGraphicFramePr>
           <p:nvPr/>
         </p:nvGraphicFramePr>
         <p:xfrm>
-          <a:off x="566928" y="1737360"/>
-          <a:ext cx="11057838" cy="2029968"/>
+          <a:off x="566928" y="2066543"/>
+          <a:ext cx="5300318" cy="1389888"/>
         </p:xfrm>
         <a:graphic>
           <a:graphicData uri="http://schemas.openxmlformats.org/drawingml/2006/table">
@@ -48037,11 +48127,11 @@
                 <a:tableStyleId>{2D5ABB26-0587-4C30-8999-92F81FD0307C}</a:tableStyleId>
               </a:tblPr>
               <a:tblGrid>
-                <a:gridCol w="3980822"/>
-                <a:gridCol w="3538508"/>
-                <a:gridCol w="3538508"/>
+                <a:gridCol w="2226134"/>
+                <a:gridCol w="1537092"/>
+                <a:gridCol w="1537092"/>
               </a:tblGrid>
-              <a:tr h="384048">
+              <a:tr h="347472">
                 <a:tc>
                   <a:txBody>
                     <a:bodyPr wrap="square"/>
@@ -48053,13 +48143,13 @@
                         </a:lnSpc>
                       </a:pPr>
                       <a:r>
-                        <a:rPr sz="1050" b="1">
+                        <a:rPr sz="950" b="1">
                           <a:solidFill>
                             <a:srgbClr val="FFFFFF"/>
                           </a:solidFill>
                           <a:latin typeface="Arial"/>
                         </a:rPr>
-                        <a:t>Metric  —  qwen2.5:14b local · 18 runs (3 datasets × 6)</a:t>
+                        <a:t>18 runs each</a:t>
                       </a:r>
                     </a:p>
                   </a:txBody>
@@ -48080,13 +48170,13 @@
                         </a:lnSpc>
                       </a:pPr>
                       <a:r>
-                        <a:rPr sz="1050" b="1">
+                        <a:rPr sz="950" b="1">
                           <a:solidFill>
                             <a:srgbClr val="FFFFFF"/>
                           </a:solidFill>
                           <a:latin typeface="Arial"/>
                         </a:rPr>
-                        <a:t>LangChain + A2A</a:t>
+                        <a:t>LangChain</a:t>
                       </a:r>
                     </a:p>
                   </a:txBody>
@@ -48107,13 +48197,13 @@
                         </a:lnSpc>
                       </a:pPr>
                       <a:r>
-                        <a:rPr sz="1050" b="1">
+                        <a:rPr sz="950" b="1">
                           <a:solidFill>
                             <a:srgbClr val="FFFFFF"/>
                           </a:solidFill>
                           <a:latin typeface="Arial"/>
                         </a:rPr>
-                        <a:t>Ballerina + MCP Proxy</a:t>
+                        <a:t>Ballerina</a:t>
                       </a:r>
                     </a:p>
                   </a:txBody>
@@ -48124,7 +48214,7 @@
                   </a:tcPr>
                 </a:tc>
               </a:tr>
-              <a:tr h="329184">
+              <a:tr h="347472">
                 <a:tc>
                   <a:txBody>
                     <a:bodyPr wrap="square"/>
@@ -48136,13 +48226,13 @@
                         </a:lnSpc>
                       </a:pPr>
                       <a:r>
-                        <a:rPr sz="1050" b="1">
+                        <a:rPr sz="1000" b="1">
                           <a:solidFill>
                             <a:srgbClr val="1B2733"/>
                           </a:solidFill>
                           <a:latin typeface="Arial"/>
                         </a:rPr>
-                        <a:t>Correct-proposal rate</a:t>
+                        <a:t>Correct-proposal</a:t>
                       </a:r>
                     </a:p>
                   </a:txBody>
@@ -48163,13 +48253,13 @@
                         </a:lnSpc>
                       </a:pPr>
                       <a:r>
-                        <a:rPr sz="1050" b="1">
+                        <a:rPr sz="1000" b="1">
                           <a:solidFill>
                             <a:srgbClr val="2E9E5B"/>
                           </a:solidFill>
                           <a:latin typeface="Arial"/>
                         </a:rPr>
-                        <a:t>11 / 18  (61%)</a:t>
+                        <a:t>61%  (11/18)</a:t>
                       </a:r>
                     </a:p>
                   </a:txBody>
@@ -48190,13 +48280,13 @@
                         </a:lnSpc>
                       </a:pPr>
                       <a:r>
-                        <a:rPr sz="1050" b="0">
+                        <a:rPr sz="1000" b="1">
                           <a:solidFill>
-                            <a:srgbClr val="D98B22"/>
+                            <a:srgbClr val="CE4A45"/>
                           </a:solidFill>
                           <a:latin typeface="Arial"/>
                         </a:rPr>
-                        <a:t>5 / 18  (28%)</a:t>
+                        <a:t>28%  (5/18)</a:t>
                       </a:r>
                     </a:p>
                   </a:txBody>
@@ -48207,7 +48297,7 @@
                   </a:tcPr>
                 </a:tc>
               </a:tr>
-              <a:tr h="329184">
+              <a:tr h="347472">
                 <a:tc>
                   <a:txBody>
                     <a:bodyPr wrap="square"/>
@@ -48219,13 +48309,13 @@
                         </a:lnSpc>
                       </a:pPr>
                       <a:r>
-                        <a:rPr sz="1050" b="1">
+                        <a:rPr sz="1000" b="1">
                           <a:solidFill>
                             <a:srgbClr val="1B2733"/>
                           </a:solidFill>
                           <a:latin typeface="Arial"/>
                         </a:rPr>
-                        <a:t>Reliability by dataset</a:t>
+                        <a:t>Median latency</a:t>
                       </a:r>
                     </a:p>
                   </a:txBody>
@@ -48246,13 +48336,13 @@
                         </a:lnSpc>
                       </a:pPr>
                       <a:r>
-                        <a:rPr sz="1050" b="1">
+                        <a:rPr sz="1000" b="1">
                           <a:solidFill>
                             <a:srgbClr val="2E9E5B"/>
                           </a:solidFill>
                           <a:latin typeface="Arial"/>
                         </a:rPr>
-                        <a:t>4/6 · 3/6 · 4/6</a:t>
+                        <a:t>62 s</a:t>
                       </a:r>
                     </a:p>
                   </a:txBody>
@@ -48273,13 +48363,13 @@
                         </a:lnSpc>
                       </a:pPr>
                       <a:r>
-                        <a:rPr sz="1050" b="0">
+                        <a:rPr sz="1000" b="0">
                           <a:solidFill>
                             <a:srgbClr val="D98B22"/>
                           </a:solidFill>
                           <a:latin typeface="Arial"/>
                         </a:rPr>
-                        <a:t>3/6 · 2/6 · 0/6</a:t>
+                        <a:t>78 s</a:t>
                       </a:r>
                     </a:p>
                   </a:txBody>
@@ -48290,7 +48380,7 @@
                   </a:tcPr>
                 </a:tc>
               </a:tr>
-              <a:tr h="329184">
+              <a:tr h="347472">
                 <a:tc>
                   <a:txBody>
                     <a:bodyPr wrap="square"/>
@@ -48302,13 +48392,13 @@
                         </a:lnSpc>
                       </a:pPr>
                       <a:r>
-                        <a:rPr sz="1050" b="1">
+                        <a:rPr sz="1000" b="1">
                           <a:solidFill>
                             <a:srgbClr val="1B2733"/>
                           </a:solidFill>
                           <a:latin typeface="Arial"/>
                         </a:rPr>
-                        <a:t>Median time-to-proposal *</a:t>
+                        <a:t>LLM calls / inv.</a:t>
                       </a:r>
                     </a:p>
                   </a:txBody>
@@ -48329,13 +48419,13 @@
                         </a:lnSpc>
                       </a:pPr>
                       <a:r>
-                        <a:rPr sz="1050" b="1">
+                        <a:rPr sz="1000" b="0">
                           <a:solidFill>
-                            <a:srgbClr val="2E9E5B"/>
+                            <a:srgbClr val="1B2733"/>
                           </a:solidFill>
                           <a:latin typeface="Arial"/>
                         </a:rPr>
-                        <a:t>~62 s</a:t>
+                        <a:t>~19</a:t>
                       </a:r>
                     </a:p>
                   </a:txBody>
@@ -48356,13 +48446,13 @@
                         </a:lnSpc>
                       </a:pPr>
                       <a:r>
-                        <a:rPr sz="1050" b="0">
+                        <a:rPr sz="1000" b="0">
                           <a:solidFill>
-                            <a:srgbClr val="D98B22"/>
+                            <a:srgbClr val="1B2733"/>
                           </a:solidFill>
                           <a:latin typeface="Arial"/>
                         </a:rPr>
-                        <a:t>~78 s</a:t>
+                        <a:t>~9</a:t>
                       </a:r>
                     </a:p>
                   </a:txBody>
@@ -48373,7 +48463,34 @@
                   </a:tcPr>
                 </a:tc>
               </a:tr>
-              <a:tr h="329184">
+            </a:tbl>
+          </a:graphicData>
+        </a:graphic>
+      </p:graphicFrame>
+      <p:graphicFrame>
+        <p:nvGraphicFramePr>
+          <p:cNvPr id="10" name="Table 9"/>
+          <p:cNvGraphicFramePr>
+            <a:graphicFrameLocks noGrp="1"/>
+          </p:cNvGraphicFramePr>
+          <p:nvPr/>
+        </p:nvGraphicFramePr>
+        <p:xfrm>
+          <a:off x="6324447" y="2066543"/>
+          <a:ext cx="5300318" cy="1389888"/>
+        </p:xfrm>
+        <a:graphic>
+          <a:graphicData uri="http://schemas.openxmlformats.org/drawingml/2006/table">
+            <a:tbl>
+              <a:tblPr firstRow="0" bandRow="0">
+                <a:tableStyleId>{2D5ABB26-0587-4C30-8999-92F81FD0307C}</a:tableStyleId>
+              </a:tblPr>
+              <a:tblGrid>
+                <a:gridCol w="2226134"/>
+                <a:gridCol w="1537092"/>
+                <a:gridCol w="1537092"/>
+              </a:tblGrid>
+              <a:tr h="347472">
                 <a:tc>
                   <a:txBody>
                     <a:bodyPr wrap="square"/>
@@ -48385,13 +48502,179 @@
                         </a:lnSpc>
                       </a:pPr>
                       <a:r>
-                        <a:rPr sz="1050" b="1">
+                        <a:rPr sz="950" b="1">
+                          <a:solidFill>
+                            <a:srgbClr val="FFFFFF"/>
+                          </a:solidFill>
+                          <a:latin typeface="Arial"/>
+                        </a:rPr>
+                        <a:t>18 runs each</a:t>
+                      </a:r>
+                    </a:p>
+                  </a:txBody>
+                  <a:tcPr anchor="ctr" marL="91440" marR="73152" marT="18288" marB="18288">
+                    <a:solidFill>
+                      <a:srgbClr val="C85A00"/>
+                    </a:solidFill>
+                  </a:tcPr>
+                </a:tc>
+                <a:tc>
+                  <a:txBody>
+                    <a:bodyPr wrap="square"/>
+                    <a:lstStyle/>
+                    <a:p>
+                      <a:pPr algn="l">
+                        <a:lnSpc>
+                          <a:spcPct val="100000"/>
+                        </a:lnSpc>
+                      </a:pPr>
+                      <a:r>
+                        <a:rPr sz="950" b="1">
+                          <a:solidFill>
+                            <a:srgbClr val="FFFFFF"/>
+                          </a:solidFill>
+                          <a:latin typeface="Arial"/>
+                        </a:rPr>
+                        <a:t>LangChain</a:t>
+                      </a:r>
+                    </a:p>
+                  </a:txBody>
+                  <a:tcPr anchor="ctr" marL="91440" marR="73152" marT="18288" marB="18288">
+                    <a:solidFill>
+                      <a:srgbClr val="C85A00"/>
+                    </a:solidFill>
+                  </a:tcPr>
+                </a:tc>
+                <a:tc>
+                  <a:txBody>
+                    <a:bodyPr wrap="square"/>
+                    <a:lstStyle/>
+                    <a:p>
+                      <a:pPr algn="l">
+                        <a:lnSpc>
+                          <a:spcPct val="100000"/>
+                        </a:lnSpc>
+                      </a:pPr>
+                      <a:r>
+                        <a:rPr sz="950" b="1">
+                          <a:solidFill>
+                            <a:srgbClr val="FFFFFF"/>
+                          </a:solidFill>
+                          <a:latin typeface="Arial"/>
+                        </a:rPr>
+                        <a:t>Ballerina</a:t>
+                      </a:r>
+                    </a:p>
+                  </a:txBody>
+                  <a:tcPr anchor="ctr" marL="91440" marR="73152" marT="18288" marB="18288">
+                    <a:solidFill>
+                      <a:srgbClr val="C85A00"/>
+                    </a:solidFill>
+                  </a:tcPr>
+                </a:tc>
+              </a:tr>
+              <a:tr h="347472">
+                <a:tc>
+                  <a:txBody>
+                    <a:bodyPr wrap="square"/>
+                    <a:lstStyle/>
+                    <a:p>
+                      <a:pPr algn="l">
+                        <a:lnSpc>
+                          <a:spcPct val="100000"/>
+                        </a:lnSpc>
+                      </a:pPr>
+                      <a:r>
+                        <a:rPr sz="1000" b="1">
                           <a:solidFill>
                             <a:srgbClr val="1B2733"/>
                           </a:solidFill>
                           <a:latin typeface="Arial"/>
                         </a:rPr>
-                        <a:t>LLM calls / investigation *</a:t>
+                        <a:t>Correct-proposal</a:t>
+                      </a:r>
+                    </a:p>
+                  </a:txBody>
+                  <a:tcPr anchor="ctr" marL="91440" marR="73152" marT="18288" marB="18288">
+                    <a:solidFill>
+                      <a:srgbClr val="F6F8FA"/>
+                    </a:solidFill>
+                  </a:tcPr>
+                </a:tc>
+                <a:tc>
+                  <a:txBody>
+                    <a:bodyPr wrap="square"/>
+                    <a:lstStyle/>
+                    <a:p>
+                      <a:pPr algn="l">
+                        <a:lnSpc>
+                          <a:spcPct val="100000"/>
+                        </a:lnSpc>
+                      </a:pPr>
+                      <a:r>
+                        <a:rPr sz="1000" b="1">
+                          <a:solidFill>
+                            <a:srgbClr val="2E9E5B"/>
+                          </a:solidFill>
+                          <a:latin typeface="Arial"/>
+                        </a:rPr>
+                        <a:t>100%  (18/18)</a:t>
+                      </a:r>
+                    </a:p>
+                  </a:txBody>
+                  <a:tcPr anchor="ctr" marL="91440" marR="73152" marT="18288" marB="18288">
+                    <a:solidFill>
+                      <a:srgbClr val="F6F8FA"/>
+                    </a:solidFill>
+                  </a:tcPr>
+                </a:tc>
+                <a:tc>
+                  <a:txBody>
+                    <a:bodyPr wrap="square"/>
+                    <a:lstStyle/>
+                    <a:p>
+                      <a:pPr algn="l">
+                        <a:lnSpc>
+                          <a:spcPct val="100000"/>
+                        </a:lnSpc>
+                      </a:pPr>
+                      <a:r>
+                        <a:rPr sz="1000" b="1">
+                          <a:solidFill>
+                            <a:srgbClr val="2E9E5B"/>
+                          </a:solidFill>
+                          <a:latin typeface="Arial"/>
+                        </a:rPr>
+                        <a:t>100%  (18/18)</a:t>
+                      </a:r>
+                    </a:p>
+                  </a:txBody>
+                  <a:tcPr anchor="ctr" marL="91440" marR="73152" marT="18288" marB="18288">
+                    <a:solidFill>
+                      <a:srgbClr val="F6F8FA"/>
+                    </a:solidFill>
+                  </a:tcPr>
+                </a:tc>
+              </a:tr>
+              <a:tr h="347472">
+                <a:tc>
+                  <a:txBody>
+                    <a:bodyPr wrap="square"/>
+                    <a:lstStyle/>
+                    <a:p>
+                      <a:pPr algn="l">
+                        <a:lnSpc>
+                          <a:spcPct val="100000"/>
+                        </a:lnSpc>
+                      </a:pPr>
+                      <a:r>
+                        <a:rPr sz="1000" b="1">
+                          <a:solidFill>
+                            <a:srgbClr val="1B2733"/>
+                          </a:solidFill>
+                          <a:latin typeface="Arial"/>
+                        </a:rPr>
+                        <a:t>Median latency</a:t>
                       </a:r>
                     </a:p>
                   </a:txBody>
@@ -48412,13 +48695,13 @@
                         </a:lnSpc>
                       </a:pPr>
                       <a:r>
-                        <a:rPr sz="1050" b="0">
+                        <a:rPr sz="1000" b="0">
                           <a:solidFill>
-                            <a:srgbClr val="1B2733"/>
+                            <a:srgbClr val="D98B22"/>
                           </a:solidFill>
                           <a:latin typeface="Arial"/>
                         </a:rPr>
-                        <a:t>~19</a:t>
+                        <a:t>36 s</a:t>
                       </a:r>
                     </a:p>
                   </a:txBody>
@@ -48439,13 +48722,13 @@
                         </a:lnSpc>
                       </a:pPr>
                       <a:r>
-                        <a:rPr sz="1050" b="1">
+                        <a:rPr sz="1000" b="1">
                           <a:solidFill>
                             <a:srgbClr val="2E9E5B"/>
                           </a:solidFill>
                           <a:latin typeface="Arial"/>
                         </a:rPr>
-                        <a:t>~9</a:t>
+                        <a:t>14 s</a:t>
                       </a:r>
                     </a:p>
                   </a:txBody>
@@ -48456,7 +48739,7 @@
                   </a:tcPr>
                 </a:tc>
               </a:tr>
-              <a:tr h="329184">
+              <a:tr h="347472">
                 <a:tc>
                   <a:txBody>
                     <a:bodyPr wrap="square"/>
@@ -48468,13 +48751,13 @@
                         </a:lnSpc>
                       </a:pPr>
                       <a:r>
-                        <a:rPr sz="1050" b="1">
+                        <a:rPr sz="1000" b="1">
                           <a:solidFill>
                             <a:srgbClr val="1B2733"/>
                           </a:solidFill>
                           <a:latin typeface="Arial"/>
                         </a:rPr>
-                        <a:t>Cost per LLM call *</a:t>
+                        <a:t>LLM calls / inv.</a:t>
                       </a:r>
                     </a:p>
                   </a:txBody>
@@ -48495,13 +48778,13 @@
                         </a:lnSpc>
                       </a:pPr>
                       <a:r>
-                        <a:rPr sz="1050" b="1">
+                        <a:rPr sz="1000" b="0">
                           <a:solidFill>
-                            <a:srgbClr val="2E9E5B"/>
+                            <a:srgbClr val="1B2733"/>
                           </a:solidFill>
                           <a:latin typeface="Arial"/>
                         </a:rPr>
-                        <a:t>~3 s  (small contexts)</a:t>
+                        <a:t>~19</a:t>
                       </a:r>
                     </a:p>
                   </a:txBody>
@@ -48522,13 +48805,13 @@
                         </a:lnSpc>
                       </a:pPr>
                       <a:r>
-                        <a:rPr sz="1050" b="0">
+                        <a:rPr sz="1000" b="0">
                           <a:solidFill>
                             <a:srgbClr val="1B2733"/>
                           </a:solidFill>
                           <a:latin typeface="Arial"/>
                         </a:rPr>
-                        <a:t>~9 s  (one big context)</a:t>
+                        <a:t>~9</a:t>
                       </a:r>
                     </a:p>
                   </a:txBody>
@@ -48545,59 +48828,14 @@
       </p:graphicFrame>
       <p:sp>
         <p:nvSpPr>
-          <p:cNvPr id="8" name="TextBox 7"/>
-          <p:cNvSpPr txBox="1"/>
-          <p:nvPr/>
-        </p:nvSpPr>
-        <p:spPr>
-          <a:xfrm>
-            <a:off x="566928" y="3840479"/>
-            <a:ext cx="11057839" cy="237744"/>
-          </a:xfrm>
-          <a:prstGeom prst="rect">
-            <a:avLst/>
-          </a:prstGeom>
-          <a:noFill/>
-        </p:spPr>
-        <p:txBody>
-          <a:bodyPr wrap="square" anchor="t" lIns="0" rIns="0" tIns="0" bIns="0">
-            <a:noAutofit/>
-          </a:bodyPr>
-          <a:lstStyle/>
-          <a:p>
-            <a:pPr algn="l">
-              <a:lnSpc>
-                <a:spcPct val="100000"/>
-              </a:lnSpc>
-              <a:spcBef>
-                <a:spcPts val="0"/>
-              </a:spcBef>
-              <a:spcAft>
-                <a:spcPts val="600"/>
-              </a:spcAft>
-            </a:pPr>
-            <a:r>
-              <a:rPr sz="850" b="0">
-                <a:solidFill>
-                  <a:srgbClr val="6B7885"/>
-                </a:solidFill>
-                <a:latin typeface="Arial"/>
-              </a:rPr>
-              <a:t>* valid runs only — failed runs bailed out faster but produced no proposal, so timing them would flatter the loser.</a:t>
-            </a:r>
-          </a:p>
-        </p:txBody>
-      </p:sp>
-      <p:sp>
-        <p:nvSpPr>
-          <p:cNvPr id="9" name="Rounded Rectangle 8"/>
+          <p:cNvPr id="11" name="Rounded Rectangle 10"/>
           <p:cNvSpPr/>
           <p:nvPr/>
         </p:nvSpPr>
         <p:spPr>
           <a:xfrm>
-            <a:off x="566928" y="4133087"/>
-            <a:ext cx="11057839" cy="1810512"/>
+            <a:off x="566928" y="3584448"/>
+            <a:ext cx="11057839" cy="1965960"/>
           </a:xfrm>
           <a:prstGeom prst="roundRect">
             <a:avLst>
@@ -48638,13 +48876,13 @@
       </p:sp>
       <p:sp>
         <p:nvSpPr>
-          <p:cNvPr id="10" name="Rectangle 9"/>
+          <p:cNvPr id="12" name="Rectangle 11"/>
           <p:cNvSpPr/>
           <p:nvPr/>
         </p:nvSpPr>
         <p:spPr>
           <a:xfrm>
-            <a:off x="768096" y="4315967"/>
+            <a:off x="768096" y="3767327"/>
             <a:ext cx="82296" cy="237744"/>
           </a:xfrm>
           <a:prstGeom prst="rect">
@@ -48682,13 +48920,13 @@
       </p:sp>
       <p:sp>
         <p:nvSpPr>
-          <p:cNvPr id="11" name="TextBox 10"/>
+          <p:cNvPr id="13" name="TextBox 12"/>
           <p:cNvSpPr txBox="1"/>
           <p:nvPr/>
         </p:nvSpPr>
         <p:spPr>
           <a:xfrm>
-            <a:off x="969264" y="4279392"/>
+            <a:off x="969264" y="3730752"/>
             <a:ext cx="10454335" cy="310896"/>
           </a:xfrm>
           <a:prstGeom prst="rect">
@@ -48720,21 +48958,21 @@
                 </a:solidFill>
                 <a:latin typeface="Arial"/>
               </a:rPr>
-              <a:t>What the data says — both my architecture-first predictions were wrong</a:t>
-            </a:r>
-          </a:p>
-        </p:txBody>
-      </p:sp>
-      <p:sp>
-        <p:nvSpPr>
-          <p:cNvPr id="12" name="TextBox 11"/>
+              <a:t>What the two models say</a:t>
+            </a:r>
+          </a:p>
+        </p:txBody>
+      </p:sp>
+      <p:sp>
+        <p:nvSpPr>
+          <p:cNvPr id="14" name="TextBox 13"/>
           <p:cNvSpPr txBox="1"/>
           <p:nvPr/>
         </p:nvSpPr>
         <p:spPr>
           <a:xfrm>
-            <a:off x="841247" y="4700016"/>
-            <a:ext cx="10509199" cy="1188720"/>
+            <a:off x="841247" y="4151376"/>
+            <a:ext cx="10509199" cy="1325880"/>
           </a:xfrm>
           <a:prstGeom prst="rect">
             <a:avLst/>
@@ -48749,7 +48987,7 @@
           <a:p>
             <a:pPr algn="l" marL="256032" indent="-256032">
               <a:lnSpc>
-                <a:spcPct val="104000"/>
+                <a:spcPct val="103000"/>
               </a:lnSpc>
               <a:spcBef>
                 <a:spcPts val="0"/>
@@ -48770,7 +49008,7 @@
                 </a:solidFill>
                 <a:latin typeface="Arial"/>
               </a:rPr>
-              <a:t>Faster = LangChain  </a:t>
+              <a:t>Model choice dominates reliability.  </a:t>
             </a:r>
             <a:r>
               <a:rPr sz="950" b="0">
@@ -48779,13 +49017,13 @@
                 </a:solidFill>
                 <a:latin typeface="Arial"/>
               </a:rPr>
-              <a:t>(62 vs 78 s median). I'd predicted Ballerina (fewer calls) — but its ~9 calls are each ~3× heavier (one big, growing context), losing to LangChain's more-but-cheaper calls on small decomposed contexts.</a:t>
+              <a:t>Local 28–61% → cloud 100% for both. The 14B's flakiness (it narrates a tool call instead of making it, and quits early) is a model problem, not an architecture one — don't ship the local model.</a:t>
             </a:r>
           </a:p>
           <a:p>
             <a:pPr algn="l" marL="256032" indent="-256032">
               <a:lnSpc>
-                <a:spcPct val="104000"/>
+                <a:spcPct val="103000"/>
               </a:lnSpc>
               <a:spcBef>
                 <a:spcPts val="0"/>
@@ -48806,7 +49044,7 @@
                 </a:solidFill>
                 <a:latin typeface="Arial"/>
               </a:rPr>
-              <a:t>More reliable = LangChain, ~2×  </a:t>
+              <a:t>The speed winner FLIPS with the model.  </a:t>
             </a:r>
             <a:r>
               <a:rPr sz="950" b="0">
@@ -48815,13 +49053,13 @@
                 </a:solidFill>
                 <a:latin typeface="Arial"/>
               </a:rPr>
-              <a:t>(61% vs 28%; Ballerina went 0/6 in one dataset). Opposite my guess too: decomposing into short sub-tasks keeps the 14B on-track better than one long single-agent protocol + discover_tools overhead.</a:t>
+              <a:t>Slow local → LangChain wins (small, cheap calls). Fast cloud → Ballerina wins ~2.6× (14 vs 36 s): its ~9 calls beat LangChain's ~19 network round-trips. 'Fewer round-trips = faster' holds — but only once inference is fast.</a:t>
             </a:r>
           </a:p>
           <a:p>
             <a:pPr algn="l" marL="256032" indent="-256032">
               <a:lnSpc>
-                <a:spcPct val="104000"/>
+                <a:spcPct val="103000"/>
               </a:lnSpc>
               <a:spcBef>
                 <a:spcPts val="0"/>
@@ -48842,7 +49080,7 @@
                 </a:solidFill>
                 <a:latin typeface="Arial"/>
               </a:rPr>
-              <a:t>Caveat + what still stands  </a:t>
+              <a:t>On the model you'd actually ship (cloud):  </a:t>
             </a:r>
             <a:r>
               <a:rPr sz="950" b="0">
@@ -48851,20 +49089,20 @@
                 </a:solidFill>
                 <a:latin typeface="Arial"/>
               </a:rPr>
-              <a:t>Both are sub-production on a local model → use a cloud model for demo/prod. Qualitative edges unchanged: Ballerina = fewer parts + WSO2-native; LangChain = code-level gate + Python familiarity.</a:t>
-            </a:r>
-          </a:p>
-        </p:txBody>
-      </p:sp>
-      <p:sp>
-        <p:nvSpPr>
-          <p:cNvPr id="13" name="TextBox 12"/>
+              <a:t>both 100% reliable, Ballerina meaningfully faster. So runtime no longer decides it — the qualitative scorecard does, on client context: Ballerina = fewer parts + WSO2-native; LangChain = code-level gate + Python familiarity.</a:t>
+            </a:r>
+          </a:p>
+        </p:txBody>
+      </p:sp>
+      <p:sp>
+        <p:nvSpPr>
+          <p:cNvPr id="15" name="TextBox 14"/>
           <p:cNvSpPr txBox="1"/>
           <p:nvPr/>
         </p:nvSpPr>
         <p:spPr>
           <a:xfrm>
-            <a:off x="566928" y="6035040"/>
+            <a:off x="566928" y="5641848"/>
             <a:ext cx="11057839" cy="365760"/>
           </a:xfrm>
           <a:prstGeom prst="rect">
@@ -48880,7 +49118,7 @@
           <a:p>
             <a:pPr algn="l">
               <a:lnSpc>
-                <a:spcPct val="112000"/>
+                <a:spcPct val="110000"/>
               </a:lnSpc>
               <a:spcBef>
                 <a:spcPts val="0"/>
@@ -48896,14 +49134,14 @@
                 </a:solidFill>
                 <a:latin typeface="Arial"/>
               </a:rPr>
-              <a:t>Method: identical qwen2.5:14b-instruct on Ollama; 3 datasets × 6 measured runs each (warm-up discarded per dataset); stacks run sequentially, never concurrent; mock MCP backends; same chaos + payload. Latency via curl, LLM calls via the Ollama access log.</a:t>
-            </a:r>
-          </a:p>
-        </p:txBody>
-      </p:sp>
-      <p:sp>
-        <p:nvSpPr>
-          <p:cNvPr id="14" name="TextBox 13"/>
+              <a:t>Method: identical model per column; 3 datasets × 6 runs each (warm-up discarded); stacks run sequentially, never concurrent; mock MCP backends; same chaos + payload. Local = qwen2.5:14b on Ollama; cloud = claude-haiku-4-5 via Anthropic. Latency = time-to-proposal via curl.</a:t>
+            </a:r>
+          </a:p>
+        </p:txBody>
+      </p:sp>
+      <p:sp>
+        <p:nvSpPr>
+          <p:cNvPr id="16" name="TextBox 15"/>
           <p:cNvSpPr txBox="1"/>
           <p:nvPr/>
         </p:nvSpPr>
@@ -48948,7 +49186,7 @@
       </p:sp>
       <p:sp>
         <p:nvSpPr>
-          <p:cNvPr id="15" name="TextBox 14"/>
+          <p:cNvPr id="17" name="TextBox 16"/>
           <p:cNvSpPr txBox="1"/>
           <p:nvPr/>
         </p:nvSpPr>
